--- a/IEP/t2-lesson2-quiz-IEP-ANSWER-KEY.pptx
+++ b/IEP/t2-lesson2-quiz-IEP-ANSWER-KEY.pptx
@@ -873,6 +873,40 @@
           </a:p>
         </p:txBody>
       </p:sp>
+      <p:sp>
+        <p:nvSpPr>
+          <p:cNvPr id="8" name="Slide Number 8"/>
+          <p:cNvSpPr txBox="1"/>
+          <p:nvPr/>
+        </p:nvSpPr>
+        <p:spPr>
+          <a:xfrm>
+            <a:off x="11277295" y="6611112"/>
+            <a:ext cx="685800" cy="201168"/>
+          </a:xfrm>
+          <a:prstGeom prst="rect">
+            <a:avLst/>
+          </a:prstGeom>
+          <a:noFill/>
+        </p:spPr>
+        <p:txBody>
+          <a:bodyPr wrap="none" lIns="0" tIns="0" rIns="0" bIns="0" anchor="b">
+            <a:noAutofit/>
+          </a:bodyPr>
+          <a:lstStyle/>
+          <a:p>
+            <a:pPr algn="r"/>
+            <a:fld id="{5C1A6E0B-3B1F-4D5E-9C7A-2F4B8D6E1A90}" type="slidenum">
+              <a:rPr lang="en-US" sz="1200" dirty="0">
+                <a:solidFill>
+                  <a:srgbClr val="5F6272"/>
+                </a:solidFill>
+              </a:rPr>
+              <a:t>1</a:t>
+            </a:fld>
+          </a:p>
+        </p:txBody>
+      </p:sp>
     </p:spTree>
   </p:cSld>
   <p:clrMapOvr>
@@ -1688,6 +1722,40 @@
           </a:p>
         </p:txBody>
       </p:sp>
+      <p:sp>
+        <p:nvSpPr>
+          <p:cNvPr id="20" name="Slide Number 20"/>
+          <p:cNvSpPr txBox="1"/>
+          <p:nvPr/>
+        </p:nvSpPr>
+        <p:spPr>
+          <a:xfrm>
+            <a:off x="11277295" y="6611112"/>
+            <a:ext cx="685800" cy="201168"/>
+          </a:xfrm>
+          <a:prstGeom prst="rect">
+            <a:avLst/>
+          </a:prstGeom>
+          <a:noFill/>
+        </p:spPr>
+        <p:txBody>
+          <a:bodyPr wrap="none" lIns="0" tIns="0" rIns="0" bIns="0" anchor="b">
+            <a:noAutofit/>
+          </a:bodyPr>
+          <a:lstStyle/>
+          <a:p>
+            <a:pPr algn="r"/>
+            <a:fld id="{5C1A6E0B-3B1F-4D5E-9C7A-2F4B8D6E1A90}" type="slidenum">
+              <a:rPr lang="en-US" sz="1200" dirty="0">
+                <a:solidFill>
+                  <a:srgbClr val="5F6272"/>
+                </a:solidFill>
+              </a:rPr>
+              <a:t>2</a:t>
+            </a:fld>
+          </a:p>
+        </p:txBody>
+      </p:sp>
     </p:spTree>
   </p:cSld>
   <p:clrMapOvr>
@@ -2500,6 +2568,40 @@
               <a:t xml:space="preserve">Topic 2 Lesson 2 Quiz · IEP Version · Answer Key (teacher copy)</a:t>
             </a:r>
             <a:endParaRPr lang="en-US" sz="1125" dirty="0"/>
+          </a:p>
+        </p:txBody>
+      </p:sp>
+      <p:sp>
+        <p:nvSpPr>
+          <p:cNvPr id="20" name="Slide Number 20"/>
+          <p:cNvSpPr txBox="1"/>
+          <p:nvPr/>
+        </p:nvSpPr>
+        <p:spPr>
+          <a:xfrm>
+            <a:off x="11277295" y="6611112"/>
+            <a:ext cx="685800" cy="201168"/>
+          </a:xfrm>
+          <a:prstGeom prst="rect">
+            <a:avLst/>
+          </a:prstGeom>
+          <a:noFill/>
+        </p:spPr>
+        <p:txBody>
+          <a:bodyPr wrap="none" lIns="0" tIns="0" rIns="0" bIns="0" anchor="b">
+            <a:noAutofit/>
+          </a:bodyPr>
+          <a:lstStyle/>
+          <a:p>
+            <a:pPr algn="r"/>
+            <a:fld id="{5C1A6E0B-3B1F-4D5E-9C7A-2F4B8D6E1A90}" type="slidenum">
+              <a:rPr lang="en-US" sz="1200" dirty="0">
+                <a:solidFill>
+                  <a:srgbClr val="5F6272"/>
+                </a:solidFill>
+              </a:rPr>
+              <a:t>3</a:t>
+            </a:fld>
           </a:p>
         </p:txBody>
       </p:sp>

--- a/IEP/t2-lesson2-quiz-IEP-ANSWER-KEY.pptx
+++ b/IEP/t2-lesson2-quiz-IEP-ANSWER-KEY.pptx
@@ -11,6 +11,7 @@
     <p:sldId id="256" r:id="rId11"/>
     <p:sldId id="257" r:id="rId12"/>
     <p:sldId id="258" r:id="rId13"/>
+    <p:sldId id="259" r:id="rId14"/>
   </p:sldIdLst>
   <p:sldSz cx="12192000" cy="6858000"/>
   <p:notesSz cx="6858000" cy="9144000"/>
@@ -227,6 +228,62 @@
 </file>
 
 <file path=ppt/notesSlides/notesSlide3.xml><?xml version="1.0" encoding="utf-8"?>
+<p:notes xmlns:a="http://schemas.openxmlformats.org/drawingml/2006/main" xmlns:r="http://schemas.openxmlformats.org/officeDocument/2006/relationships" xmlns:p="http://schemas.openxmlformats.org/presentationml/2006/main">
+  <p:cSld>
+    <p:spTree>
+      <p:nvGrpSpPr>
+        <p:cNvPr id="1" name=""/>
+        <p:cNvGrpSpPr/>
+        <p:nvPr/>
+      </p:nvGrpSpPr>
+      <p:grpSpPr>
+        <a:xfrm>
+          <a:off x="0" y="0"/>
+          <a:ext cx="0" cy="0"/>
+          <a:chOff x="0" y="0"/>
+          <a:chExt cx="0" cy="0"/>
+        </a:xfrm>
+      </p:grpSpPr>
+      <p:sp>
+        <p:nvSpPr>
+          <p:cNvPr id="2" name="Slide Image Placeholder 1"/>
+          <p:cNvSpPr>
+            <a:spLocks noGrp="1" noRot="1" noChangeAspect="1"/>
+          </p:cNvSpPr>
+          <p:nvPr>
+            <p:ph type="sldImg"/>
+          </p:nvPr>
+        </p:nvSpPr>
+        <p:spPr/>
+      </p:sp>
+      <p:sp>
+        <p:nvSpPr>
+          <p:cNvPr id="3" name="Notes Placeholder 2"/>
+          <p:cNvSpPr>
+            <a:spLocks noGrp="1"/>
+          </p:cNvSpPr>
+          <p:nvPr>
+            <p:ph type="body" idx="1"/>
+          </p:nvPr>
+        </p:nvSpPr>
+        <p:spPr/>
+        <p:txBody>
+          <a:bodyPr/>
+          <a:lstStyle/>
+          <a:p>
+            <a:endParaRPr lang="en-US"/>
+          </a:p>
+        </p:txBody>
+      </p:sp>
+    </p:spTree>
+  </p:cSld>
+  <p:clrMapOvr>
+    <a:masterClrMapping/>
+  </p:clrMapOvr>
+</p:notes>
+</file>
+
+<file path=ppt/notesSlides/notesSlide4.xml><?xml version="1.0" encoding="utf-8"?>
 <p:notes xmlns:a="http://schemas.openxmlformats.org/drawingml/2006/main" xmlns:r="http://schemas.openxmlformats.org/officeDocument/2006/relationships" xmlns:p="http://schemas.openxmlformats.org/presentationml/2006/main">
   <p:cSld>
     <p:spTree>
@@ -731,7 +788,7 @@
                 <a:latin typeface="Segoe UI"/>
                 <a:cs typeface="Segoe UI"/>
               </a:rPr>
-              <a:t xml:space="preserve">6 questions, 1 point each. The answer choices are shuffled for each student, so match the answer text, not the letter.</a:t>
+              <a:t xml:space="preserve">8 questions, 1 point each. The answer choices are shuffled for each student, so match the answer text, not the letter.</a:t>
             </a:r>
             <a:endParaRPr lang="en-US" sz="1950" dirty="0"/>
           </a:p>
@@ -2601,6 +2658,673 @@
                 </a:solidFill>
               </a:rPr>
               <a:t>3</a:t>
+            </a:fld>
+          </a:p>
+        </p:txBody>
+      </p:sp>
+    </p:spTree>
+  </p:cSld>
+  <p:clrMapOvr>
+    <a:masterClrMapping/>
+  </p:clrMapOvr>
+  <p:transition spd="med">
+    <p:fade/>
+  </p:transition>
+</p:sld>
+</file>
+
+<file path=ppt/slides/slide4.xml><?xml version="1.0" encoding="utf-8"?>
+<p:sld xmlns:a="http://schemas.openxmlformats.org/drawingml/2006/main" xmlns:r="http://schemas.openxmlformats.org/officeDocument/2006/relationships" xmlns:p="http://schemas.openxmlformats.org/presentationml/2006/main">
+  <p:cSld>
+    <p:spTree>
+      <p:nvGrpSpPr>
+        <p:cNvPr id="1" name=""/>
+        <p:cNvGrpSpPr/>
+        <p:nvPr/>
+      </p:nvGrpSpPr>
+      <p:grpSpPr>
+        <a:xfrm>
+          <a:off x="0" y="0"/>
+          <a:ext cx="0" cy="0"/>
+          <a:chOff x="0" y="0"/>
+          <a:chExt cx="0" cy="0"/>
+        </a:xfrm>
+      </p:grpSpPr>
+      <p:sp>
+        <p:nvSpPr>
+          <p:cNvPr id="2" name="Shape 2"/>
+          <p:cNvSpPr txBox="1"/>
+          <p:nvPr/>
+        </p:nvSpPr>
+        <p:spPr>
+          <a:xfrm>
+            <a:off x="685800" y="457200"/>
+            <a:ext cx="10820095" cy="580644"/>
+          </a:xfrm>
+          <a:prstGeom prst="rect">
+            <a:avLst/>
+          </a:prstGeom>
+          <a:noFill/>
+          <a:ln>
+            <a:noFill/>
+          </a:ln>
+        </p:spPr>
+        <p:txBody>
+          <a:bodyPr wrap="square" lIns="36576" tIns="27432" rIns="36576" bIns="27432" anchor="t">
+            <a:noAutofit/>
+          </a:bodyPr>
+          <a:lstStyle/>
+          <a:p>
+            <a:pPr algn="l">
+              <a:lnSpc>
+                <a:spcPct val="100000"/>
+              </a:lnSpc>
+            </a:pPr>
+            <a:r>
+              <a:rPr lang="en-US" sz="3450" dirty="0" b="1">
+                <a:solidFill>
+                  <a:srgbClr val="16171D"/>
+                </a:solidFill>
+                <a:latin typeface="Segoe UI"/>
+                <a:cs typeface="Segoe UI"/>
+              </a:rPr>
+              <a:t xml:space="preserve">Questions 7–8</a:t>
+            </a:r>
+            <a:endParaRPr lang="en-US" sz="3450" dirty="0"/>
+          </a:p>
+        </p:txBody>
+      </p:sp>
+      <p:sp>
+        <p:nvSpPr>
+          <p:cNvPr id="3" name="Shape 3"/>
+          <p:cNvSpPr txBox="1"/>
+          <p:nvPr/>
+        </p:nvSpPr>
+        <p:spPr>
+          <a:xfrm>
+            <a:off x="685800" y="1209294"/>
+            <a:ext cx="2164019" cy="498348"/>
+          </a:xfrm>
+          <a:prstGeom prst="rect">
+            <a:avLst/>
+          </a:prstGeom>
+          <a:noFill/>
+          <a:ln>
+            <a:noFill/>
+          </a:ln>
+        </p:spPr>
+        <p:txBody>
+          <a:bodyPr wrap="square" lIns="109728" tIns="45720" rIns="109728" bIns="45720" anchor="ctr">
+            <a:noAutofit/>
+          </a:bodyPr>
+          <a:lstStyle/>
+          <a:p>
+            <a:pPr algn="l">
+              <a:lnSpc>
+                <a:spcPct val="100000"/>
+              </a:lnSpc>
+            </a:pPr>
+            <a:r>
+              <a:rPr lang="en-US" sz="1950" dirty="0" b="1">
+                <a:solidFill>
+                  <a:srgbClr val="16171D"/>
+                </a:solidFill>
+                <a:latin typeface="Segoe UI"/>
+                <a:cs typeface="Segoe UI"/>
+              </a:rPr>
+              <a:t xml:space="preserve">#</a:t>
+            </a:r>
+            <a:endParaRPr lang="en-US" sz="1950" dirty="0"/>
+          </a:p>
+        </p:txBody>
+      </p:sp>
+      <p:sp>
+        <p:nvSpPr>
+          <p:cNvPr id="4" name="Shape 4"/>
+          <p:cNvSpPr txBox="1"/>
+          <p:nvPr/>
+        </p:nvSpPr>
+        <p:spPr>
+          <a:xfrm>
+            <a:off x="2849819" y="1209294"/>
+            <a:ext cx="4328038" cy="498348"/>
+          </a:xfrm>
+          <a:prstGeom prst="rect">
+            <a:avLst/>
+          </a:prstGeom>
+          <a:noFill/>
+          <a:ln>
+            <a:noFill/>
+          </a:ln>
+        </p:spPr>
+        <p:txBody>
+          <a:bodyPr wrap="square" lIns="109728" tIns="45720" rIns="109728" bIns="45720" anchor="ctr">
+            <a:noAutofit/>
+          </a:bodyPr>
+          <a:lstStyle/>
+          <a:p>
+            <a:pPr algn="l">
+              <a:lnSpc>
+                <a:spcPct val="100000"/>
+              </a:lnSpc>
+            </a:pPr>
+            <a:r>
+              <a:rPr lang="en-US" sz="1950" dirty="0" b="1">
+                <a:solidFill>
+                  <a:srgbClr val="16171D"/>
+                </a:solidFill>
+                <a:latin typeface="Segoe UI"/>
+                <a:cs typeface="Segoe UI"/>
+              </a:rPr>
+              <a:t xml:space="preserve">Question</a:t>
+            </a:r>
+            <a:endParaRPr lang="en-US" sz="1950" dirty="0"/>
+          </a:p>
+        </p:txBody>
+      </p:sp>
+      <p:sp>
+        <p:nvSpPr>
+          <p:cNvPr id="5" name="Shape 5"/>
+          <p:cNvSpPr txBox="1"/>
+          <p:nvPr/>
+        </p:nvSpPr>
+        <p:spPr>
+          <a:xfrm>
+            <a:off x="7177857" y="1209294"/>
+            <a:ext cx="4328038" cy="498348"/>
+          </a:xfrm>
+          <a:prstGeom prst="rect">
+            <a:avLst/>
+          </a:prstGeom>
+          <a:noFill/>
+          <a:ln>
+            <a:noFill/>
+          </a:ln>
+        </p:spPr>
+        <p:txBody>
+          <a:bodyPr wrap="square" lIns="109728" tIns="45720" rIns="109728" bIns="45720" anchor="ctr">
+            <a:noAutofit/>
+          </a:bodyPr>
+          <a:lstStyle/>
+          <a:p>
+            <a:pPr algn="l">
+              <a:lnSpc>
+                <a:spcPct val="100000"/>
+              </a:lnSpc>
+            </a:pPr>
+            <a:r>
+              <a:rPr lang="en-US" sz="1950" dirty="0" b="1">
+                <a:solidFill>
+                  <a:srgbClr val="16171D"/>
+                </a:solidFill>
+                <a:latin typeface="Segoe UI"/>
+                <a:cs typeface="Segoe UI"/>
+              </a:rPr>
+              <a:t xml:space="preserve">Answer and why</a:t>
+            </a:r>
+            <a:endParaRPr lang="en-US" sz="1950" dirty="0"/>
+          </a:p>
+        </p:txBody>
+      </p:sp>
+      <p:cxnSp>
+        <p:nvCxnSpPr>
+          <p:cNvPr id="6" name="Line 6"/>
+          <p:cNvCxnSpPr/>
+          <p:nvPr/>
+        </p:nvCxnSpPr>
+        <p:spPr>
+          <a:xfrm>
+            <a:off x="685800" y="1707642"/>
+            <a:ext cx="10820095" cy="0"/>
+          </a:xfrm>
+          <a:prstGeom prst="line">
+            <a:avLst/>
+          </a:prstGeom>
+          <a:ln w="9525" cap="flat">
+            <a:solidFill>
+              <a:srgbClr val="E3E4EC"/>
+            </a:solidFill>
+          </a:ln>
+        </p:spPr>
+      </p:cxnSp>
+      <p:sp>
+        <p:nvSpPr>
+          <p:cNvPr id="7" name="Shape 7"/>
+          <p:cNvSpPr txBox="1"/>
+          <p:nvPr/>
+        </p:nvSpPr>
+        <p:spPr>
+          <a:xfrm>
+            <a:off x="685800" y="1707642"/>
+            <a:ext cx="2164019" cy="1024128"/>
+          </a:xfrm>
+          <a:prstGeom prst="rect">
+            <a:avLst/>
+          </a:prstGeom>
+          <a:noFill/>
+          <a:ln>
+            <a:noFill/>
+          </a:ln>
+        </p:spPr>
+        <p:txBody>
+          <a:bodyPr wrap="square" lIns="109728" tIns="45720" rIns="109728" bIns="45720" anchor="ctr">
+            <a:noAutofit/>
+          </a:bodyPr>
+          <a:lstStyle/>
+          <a:p>
+            <a:pPr algn="l">
+              <a:lnSpc>
+                <a:spcPct val="100000"/>
+              </a:lnSpc>
+            </a:pPr>
+            <a:r>
+              <a:rPr lang="en-US" sz="1800" dirty="0" b="1">
+                <a:solidFill>
+                  <a:srgbClr val="16171D"/>
+                </a:solidFill>
+                <a:latin typeface="Segoe UI"/>
+                <a:cs typeface="Segoe UI"/>
+              </a:rPr>
+              <a:t xml:space="preserve">7</a:t>
+            </a:r>
+            <a:r>
+              <a:rPr lang="en-US" sz="1800" dirty="0">
+                <a:solidFill>
+                  <a:srgbClr val="16171D"/>
+                </a:solidFill>
+                <a:latin typeface="Segoe UI"/>
+                <a:cs typeface="Segoe UI"/>
+              </a:rPr>
+              <a:t xml:space="preserve"> (was 12) · SE p. 293</a:t>
+            </a:r>
+            <a:endParaRPr lang="en-US" sz="1800" dirty="0"/>
+          </a:p>
+        </p:txBody>
+      </p:sp>
+      <p:sp>
+        <p:nvSpPr>
+          <p:cNvPr id="8" name="Shape 8"/>
+          <p:cNvSpPr txBox="1"/>
+          <p:nvPr/>
+        </p:nvSpPr>
+        <p:spPr>
+          <a:xfrm>
+            <a:off x="2849819" y="1707642"/>
+            <a:ext cx="4328038" cy="1024128"/>
+          </a:xfrm>
+          <a:prstGeom prst="rect">
+            <a:avLst/>
+          </a:prstGeom>
+          <a:noFill/>
+          <a:ln>
+            <a:noFill/>
+          </a:ln>
+        </p:spPr>
+        <p:txBody>
+          <a:bodyPr wrap="square" lIns="109728" tIns="45720" rIns="109728" bIns="45720" anchor="ctr">
+            <a:noAutofit/>
+          </a:bodyPr>
+          <a:lstStyle/>
+          <a:p>
+            <a:pPr algn="l">
+              <a:lnSpc>
+                <a:spcPct val="100000"/>
+              </a:lnSpc>
+            </a:pPr>
+            <a:r>
+              <a:rPr lang="en-US" sz="1800" dirty="0">
+                <a:solidFill>
+                  <a:srgbClr val="16171D"/>
+                </a:solidFill>
+                <a:latin typeface="Segoe UI"/>
+                <a:cs typeface="Segoe UI"/>
+              </a:rPr>
+              <a:t xml:space="preserve">The graph of f(x) = 5x is translated right 1 unit. Which function represents the new graph?</a:t>
+            </a:r>
+            <a:endParaRPr lang="en-US" sz="1800" dirty="0"/>
+          </a:p>
+        </p:txBody>
+      </p:sp>
+      <p:sp>
+        <p:nvSpPr>
+          <p:cNvPr id="9" name="Shape 9"/>
+          <p:cNvSpPr txBox="1"/>
+          <p:nvPr/>
+        </p:nvSpPr>
+        <p:spPr>
+          <a:xfrm>
+            <a:off x="7177857" y="1707642"/>
+            <a:ext cx="4328038" cy="1024128"/>
+          </a:xfrm>
+          <a:prstGeom prst="rect">
+            <a:avLst/>
+          </a:prstGeom>
+          <a:noFill/>
+          <a:ln>
+            <a:noFill/>
+          </a:ln>
+        </p:spPr>
+        <p:txBody>
+          <a:bodyPr wrap="square" lIns="109728" tIns="45720" rIns="109728" bIns="45720" anchor="ctr">
+            <a:noAutofit/>
+          </a:bodyPr>
+          <a:lstStyle/>
+          <a:p>
+            <a:pPr algn="l">
+              <a:lnSpc>
+                <a:spcPct val="100000"/>
+              </a:lnSpc>
+            </a:pPr>
+            <a:r>
+              <a:rPr lang="en-US" sz="1800" dirty="0" b="1">
+                <a:solidFill>
+                  <a:srgbClr val="16171D"/>
+                </a:solidFill>
+                <a:latin typeface="Segoe UI"/>
+                <a:cs typeface="Segoe UI"/>
+              </a:rPr>
+              <a:t xml:space="preserve">g(x) = 5x − 5</a:t>
+            </a:r>
+            <a:br>
+              <a:rPr lang="en-US" sz="1800" dirty="0">
+                <a:solidFill>
+                  <a:srgbClr val="16171D"/>
+                </a:solidFill>
+                <a:latin typeface="Segoe UI"/>
+                <a:cs typeface="Segoe UI"/>
+              </a:rPr>
+            </a:br>
+            <a:r>
+              <a:rPr lang="en-US" sz="1800" dirty="0">
+                <a:solidFill>
+                  <a:srgbClr val="16171D"/>
+                </a:solidFill>
+                <a:latin typeface="Segoe UI"/>
+                <a:cs typeface="Segoe UI"/>
+              </a:rPr>
+              <a:t xml:space="preserve">Right 1 means f(x − 1) = 5(x − 1) = 5x − 5.</a:t>
+            </a:r>
+            <a:endParaRPr lang="en-US" sz="1800" dirty="0"/>
+          </a:p>
+        </p:txBody>
+      </p:sp>
+      <p:cxnSp>
+        <p:nvCxnSpPr>
+          <p:cNvPr id="10" name="Line 10"/>
+          <p:cNvCxnSpPr/>
+          <p:nvPr/>
+        </p:nvCxnSpPr>
+        <p:spPr>
+          <a:xfrm>
+            <a:off x="685800" y="2731770"/>
+            <a:ext cx="10820095" cy="0"/>
+          </a:xfrm>
+          <a:prstGeom prst="line">
+            <a:avLst/>
+          </a:prstGeom>
+          <a:ln w="9525" cap="flat">
+            <a:solidFill>
+              <a:srgbClr val="E3E4EC"/>
+            </a:solidFill>
+          </a:ln>
+        </p:spPr>
+      </p:cxnSp>
+      <p:sp>
+        <p:nvSpPr>
+          <p:cNvPr id="11" name="Shape 11"/>
+          <p:cNvSpPr txBox="1"/>
+          <p:nvPr/>
+        </p:nvSpPr>
+        <p:spPr>
+          <a:xfrm>
+            <a:off x="685800" y="2731770"/>
+            <a:ext cx="2164019" cy="1024128"/>
+          </a:xfrm>
+          <a:prstGeom prst="rect">
+            <a:avLst/>
+          </a:prstGeom>
+          <a:noFill/>
+          <a:ln>
+            <a:noFill/>
+          </a:ln>
+        </p:spPr>
+        <p:txBody>
+          <a:bodyPr wrap="square" lIns="109728" tIns="45720" rIns="109728" bIns="45720" anchor="ctr">
+            <a:noAutofit/>
+          </a:bodyPr>
+          <a:lstStyle/>
+          <a:p>
+            <a:pPr algn="l">
+              <a:lnSpc>
+                <a:spcPct val="100000"/>
+              </a:lnSpc>
+            </a:pPr>
+            <a:r>
+              <a:rPr lang="en-US" sz="1800" dirty="0" b="1">
+                <a:solidFill>
+                  <a:srgbClr val="16171D"/>
+                </a:solidFill>
+                <a:latin typeface="Segoe UI"/>
+                <a:cs typeface="Segoe UI"/>
+              </a:rPr>
+              <a:t xml:space="preserve">8</a:t>
+            </a:r>
+            <a:r>
+              <a:rPr lang="en-US" sz="1800" dirty="0">
+                <a:solidFill>
+                  <a:srgbClr val="16171D"/>
+                </a:solidFill>
+                <a:latin typeface="Segoe UI"/>
+                <a:cs typeface="Segoe UI"/>
+              </a:rPr>
+              <a:t xml:space="preserve"> (was 13) · SE p. 293</a:t>
+            </a:r>
+            <a:endParaRPr lang="en-US" sz="1800" dirty="0"/>
+          </a:p>
+        </p:txBody>
+      </p:sp>
+      <p:sp>
+        <p:nvSpPr>
+          <p:cNvPr id="12" name="Shape 12"/>
+          <p:cNvSpPr txBox="1"/>
+          <p:nvPr/>
+        </p:nvSpPr>
+        <p:spPr>
+          <a:xfrm>
+            <a:off x="2849819" y="2731770"/>
+            <a:ext cx="4328038" cy="1024128"/>
+          </a:xfrm>
+          <a:prstGeom prst="rect">
+            <a:avLst/>
+          </a:prstGeom>
+          <a:noFill/>
+          <a:ln>
+            <a:noFill/>
+          </a:ln>
+        </p:spPr>
+        <p:txBody>
+          <a:bodyPr wrap="square" lIns="109728" tIns="45720" rIns="109728" bIns="45720" anchor="ctr">
+            <a:noAutofit/>
+          </a:bodyPr>
+          <a:lstStyle/>
+          <a:p>
+            <a:pPr algn="l">
+              <a:lnSpc>
+                <a:spcPct val="100000"/>
+              </a:lnSpc>
+            </a:pPr>
+            <a:r>
+              <a:rPr lang="en-US" sz="1800" dirty="0">
+                <a:solidFill>
+                  <a:srgbClr val="16171D"/>
+                </a:solidFill>
+                <a:latin typeface="Segoe UI"/>
+                <a:cs typeface="Segoe UI"/>
+              </a:rPr>
+              <a:t xml:space="preserve">The graph of f(x) = ½x is translated left 4 units. Which function represents the new graph?</a:t>
+            </a:r>
+            <a:endParaRPr lang="en-US" sz="1800" dirty="0"/>
+          </a:p>
+        </p:txBody>
+      </p:sp>
+      <p:sp>
+        <p:nvSpPr>
+          <p:cNvPr id="13" name="Shape 13"/>
+          <p:cNvSpPr txBox="1"/>
+          <p:nvPr/>
+        </p:nvSpPr>
+        <p:spPr>
+          <a:xfrm>
+            <a:off x="7177857" y="2731770"/>
+            <a:ext cx="4328038" cy="1024128"/>
+          </a:xfrm>
+          <a:prstGeom prst="rect">
+            <a:avLst/>
+          </a:prstGeom>
+          <a:noFill/>
+          <a:ln>
+            <a:noFill/>
+          </a:ln>
+        </p:spPr>
+        <p:txBody>
+          <a:bodyPr wrap="square" lIns="109728" tIns="45720" rIns="109728" bIns="45720" anchor="ctr">
+            <a:noAutofit/>
+          </a:bodyPr>
+          <a:lstStyle/>
+          <a:p>
+            <a:pPr algn="l">
+              <a:lnSpc>
+                <a:spcPct val="100000"/>
+              </a:lnSpc>
+            </a:pPr>
+            <a:r>
+              <a:rPr lang="en-US" sz="1800" dirty="0" b="1">
+                <a:solidFill>
+                  <a:srgbClr val="16171D"/>
+                </a:solidFill>
+                <a:latin typeface="Segoe UI"/>
+                <a:cs typeface="Segoe UI"/>
+              </a:rPr>
+              <a:t xml:space="preserve">g(x) = ½x + 2</a:t>
+            </a:r>
+            <a:br>
+              <a:rPr lang="en-US" sz="1800" dirty="0">
+                <a:solidFill>
+                  <a:srgbClr val="16171D"/>
+                </a:solidFill>
+                <a:latin typeface="Segoe UI"/>
+                <a:cs typeface="Segoe UI"/>
+              </a:rPr>
+            </a:br>
+            <a:r>
+              <a:rPr lang="en-US" sz="1800" dirty="0">
+                <a:solidFill>
+                  <a:srgbClr val="16171D"/>
+                </a:solidFill>
+                <a:latin typeface="Segoe UI"/>
+                <a:cs typeface="Segoe UI"/>
+              </a:rPr>
+              <a:t xml:space="preserve">Left 4 means f(x + 4) = ½(x + 4) = ½x + 2.</a:t>
+            </a:r>
+            <a:endParaRPr lang="en-US" sz="1800" dirty="0"/>
+          </a:p>
+        </p:txBody>
+      </p:sp>
+      <p:cxnSp>
+        <p:nvCxnSpPr>
+          <p:cNvPr id="14" name="Line 14"/>
+          <p:cNvCxnSpPr/>
+          <p:nvPr/>
+        </p:nvCxnSpPr>
+        <p:spPr>
+          <a:xfrm>
+            <a:off x="685800" y="3755898"/>
+            <a:ext cx="10820095" cy="0"/>
+          </a:xfrm>
+          <a:prstGeom prst="line">
+            <a:avLst/>
+          </a:prstGeom>
+          <a:ln w="9525" cap="flat">
+            <a:solidFill>
+              <a:srgbClr val="E3E4EC"/>
+            </a:solidFill>
+          </a:ln>
+        </p:spPr>
+      </p:cxnSp>
+      <p:sp>
+        <p:nvSpPr>
+          <p:cNvPr id="15" name="Shape 15"/>
+          <p:cNvSpPr txBox="1"/>
+          <p:nvPr/>
+        </p:nvSpPr>
+        <p:spPr>
+          <a:xfrm>
+            <a:off x="685800" y="6357366"/>
+            <a:ext cx="10820095" cy="226314"/>
+          </a:xfrm>
+          <a:prstGeom prst="rect">
+            <a:avLst/>
+          </a:prstGeom>
+          <a:noFill/>
+          <a:ln>
+            <a:noFill/>
+          </a:ln>
+        </p:spPr>
+        <p:txBody>
+          <a:bodyPr wrap="square" lIns="36576" tIns="27432" rIns="36576" bIns="27432" anchor="t">
+            <a:noAutofit/>
+          </a:bodyPr>
+          <a:lstStyle/>
+          <a:p>
+            <a:pPr algn="l">
+              <a:lnSpc>
+                <a:spcPct val="100000"/>
+              </a:lnSpc>
+            </a:pPr>
+            <a:r>
+              <a:rPr lang="en-US" sz="1125" dirty="0">
+                <a:solidFill>
+                  <a:srgbClr val="5F6272"/>
+                </a:solidFill>
+                <a:latin typeface="Segoe UI"/>
+                <a:cs typeface="Segoe UI"/>
+              </a:rPr>
+              <a:t xml:space="preserve">Topic 2 Lesson 2 Quiz · IEP Version · Answer Key (teacher copy)</a:t>
+            </a:r>
+            <a:endParaRPr lang="en-US" sz="1125" dirty="0"/>
+          </a:p>
+        </p:txBody>
+      </p:sp>
+      <p:sp>
+        <p:nvSpPr>
+          <p:cNvPr id="16" name="Slide Number 16"/>
+          <p:cNvSpPr txBox="1"/>
+          <p:nvPr/>
+        </p:nvSpPr>
+        <p:spPr>
+          <a:xfrm>
+            <a:off x="11277295" y="6611112"/>
+            <a:ext cx="685800" cy="201168"/>
+          </a:xfrm>
+          <a:prstGeom prst="rect">
+            <a:avLst/>
+          </a:prstGeom>
+          <a:noFill/>
+        </p:spPr>
+        <p:txBody>
+          <a:bodyPr wrap="none" lIns="0" tIns="0" rIns="0" bIns="0" anchor="b">
+            <a:noAutofit/>
+          </a:bodyPr>
+          <a:lstStyle/>
+          <a:p>
+            <a:pPr algn="r"/>
+            <a:fld id="{5C1A6E0B-3B1F-4D5E-9C7A-2F4B8D6E1A90}" type="slidenum">
+              <a:rPr lang="en-US" sz="1200" dirty="0">
+                <a:solidFill>
+                  <a:srgbClr val="5F6272"/>
+                </a:solidFill>
+              </a:rPr>
+              <a:t>4</a:t>
             </a:fld>
           </a:p>
         </p:txBody>
